--- a/output/archive/QuenverellData/training/bioinformatics/2021/bioinformatics-for-chemists-training-v1.pptx
+++ b/output/archive/QuenverellData/training/bioinformatics/2021/bioinformatics-for-chemists-training-v1.pptx
@@ -3310,7 +3310,16 @@
               <a:rPr sz="2000">
                 <a:latin typeface="Arial"/>
               </a:rPr>
-              <a:t>Small studies can mislead; check cell numbers</a:t>
+              <a:t>Check donor/sample replication, cell numbers and batch effects</a:t>
+            </a:r>
+          </a:p>
+          <a:p>
+            <a:pPr/>
+            <a:r>
+              <a:rPr sz="2000">
+                <a:latin typeface="Arial"/>
+              </a:rPr>
+              <a:t>Cells from one donor are not independent biological replicates</a:t>
             </a:r>
           </a:p>
         </p:txBody>
@@ -6278,7 +6287,7 @@
               <a:rPr sz="2000">
                 <a:latin typeface="Arial"/>
               </a:rPr>
-              <a:t>Count how many RNA copies of each gene a sample contains</a:t>
+              <a:t>Sequence sampled RNA-derived fragments and estimate relative transcript abundance after normalisation</a:t>
             </a:r>
           </a:p>
           <a:p>
@@ -6465,7 +6474,7 @@
               <a:rPr sz="2000">
                 <a:latin typeface="Arial"/>
               </a:rPr>
-              <a:t>x-axis: size of the change (log fold change)</a:t>
+              <a:t>x-axis: log2 fold change</a:t>
             </a:r>
           </a:p>
           <a:p>
@@ -6474,7 +6483,7 @@
               <a:rPr sz="2000">
                 <a:latin typeface="Arial"/>
               </a:rPr>
-              <a:t>y-axis: confidence (adjusted p-value)</a:t>
+              <a:t>y-axis: -log10(adjusted p-value)</a:t>
             </a:r>
           </a:p>
           <a:p>
@@ -6483,7 +6492,16 @@
               <a:rPr sz="2000">
                 <a:latin typeface="Arial"/>
               </a:rPr>
-              <a:t>Top corners: large, confident changes</a:t>
+              <a:t>Upper corners: large changes with small adjusted p-values</a:t>
+            </a:r>
+          </a:p>
+          <a:p>
+            <a:pPr/>
+            <a:r>
+              <a:rPr sz="2000">
+                <a:latin typeface="Arial"/>
+              </a:rPr>
+              <a:t>Assess biological relevance and replication separately</a:t>
             </a:r>
           </a:p>
           <a:p>
